--- a/参赛材料/8-作品介绍PPT.pptx
+++ b/参赛材料/8-作品介绍PPT.pptx
@@ -4033,7 +4033,7 @@
                 </a:solidFill>
                 <a:latin typeface="微软雅黑"/>
               </a:rPr>
-              <a:t>11</a:t>
+              <a:t>29</a:t>
             </a:r>
           </a:p>
         </p:txBody>
@@ -5023,7 +5023,7 @@
                 </a:solidFill>
                 <a:latin typeface="微软雅黑"/>
               </a:rPr>
-              <a:t>• 工程完整度：62 项自动化测试 · Docker 一键部署 · 全量审计 · 细粒度权限</a:t>
+              <a:t>• 工程完整度：169 个自动化测试用例 · Docker 一键部署 · 全量审计 · 细粒度权限</a:t>
             </a:r>
           </a:p>
         </p:txBody>
@@ -6276,7 +6276,7 @@
                 </a:solidFill>
                 <a:latin typeface="微软雅黑"/>
               </a:rPr>
-              <a:t>• 28 张业务表 · PostgreSQL 兼容嵌入式数据库</a:t>
+              <a:t>• 29 张业务表 · PostgreSQL 兼容嵌入式数据库</a:t>
             </a:r>
           </a:p>
           <a:p>
@@ -7020,7 +7020,7 @@
                 <a:latin typeface="微软雅黑"/>
               </a:rPr>
               <a:t>数据层  PGlite 嵌入式 PostgreSQL
-28 张业务表 · 幂等迁移 · 容器卷持久化</a:t>
+29 张业务表 · 幂等迁移 · 容器卷持久化</a:t>
             </a:r>
           </a:p>
         </p:txBody>

--- a/参赛材料/8-作品介绍PPT.pptx
+++ b/参赛材料/8-作品介绍PPT.pptx
@@ -5023,7 +5023,7 @@
                 </a:solidFill>
                 <a:latin typeface="微软雅黑"/>
               </a:rPr>
-              <a:t>• 工程完整度：169 个自动化测试用例 · Docker 一键部署 · 全量审计 · 细粒度权限</a:t>
+              <a:t>• 工程完整度：173 个自动化测试用例 · Docker 一键部署 · 全量审计 · 细粒度权限</a:t>
             </a:r>
           </a:p>
         </p:txBody>

--- a/参赛材料/8-作品介绍PPT.pptx
+++ b/参赛材料/8-作品介绍PPT.pptx
@@ -4033,7 +4033,7 @@
                 </a:solidFill>
                 <a:latin typeface="微软雅黑"/>
               </a:rPr>
-              <a:t>11</a:t>
+              <a:t>29</a:t>
             </a:r>
           </a:p>
         </p:txBody>
@@ -5023,7 +5023,7 @@
                 </a:solidFill>
                 <a:latin typeface="微软雅黑"/>
               </a:rPr>
-              <a:t>• 工程完整度：62 项自动化测试 · Docker 一键部署 · 全量审计 · 细粒度权限</a:t>
+              <a:t>• 工程完整度：173 个自动化测试用例 · Docker 一键部署 · 全量审计 · 细粒度权限</a:t>
             </a:r>
           </a:p>
         </p:txBody>
@@ -6276,7 +6276,7 @@
                 </a:solidFill>
                 <a:latin typeface="微软雅黑"/>
               </a:rPr>
-              <a:t>• 28 张业务表 · PostgreSQL 兼容嵌入式数据库</a:t>
+              <a:t>• 29 张业务表 · PostgreSQL 兼容嵌入式数据库</a:t>
             </a:r>
           </a:p>
           <a:p>
@@ -7020,7 +7020,7 @@
                 <a:latin typeface="微软雅黑"/>
               </a:rPr>
               <a:t>数据层  PGlite 嵌入式 PostgreSQL
-28 张业务表 · 幂等迁移 · 容器卷持久化</a:t>
+29 张业务表 · 幂等迁移 · 容器卷持久化</a:t>
             </a:r>
           </a:p>
         </p:txBody>

--- a/参赛材料/8-作品介绍PPT.pptx
+++ b/参赛材料/8-作品介绍PPT.pptx
@@ -5023,7 +5023,7 @@
                 </a:solidFill>
                 <a:latin typeface="微软雅黑"/>
               </a:rPr>
-              <a:t>• 工程完整度：173 个自动化测试用例 · Docker 一键部署 · 全量审计 · 细粒度权限</a:t>
+              <a:t>• 工程完整度：193 个自动化测试用例 · Docker 一键部署 · 全量审计 · 细粒度权限</a:t>
             </a:r>
           </a:p>
         </p:txBody>

--- a/参赛材料/8-作品介绍PPT.pptx
+++ b/参赛材料/8-作品介绍PPT.pptx
@@ -5023,7 +5023,7 @@
                 </a:solidFill>
                 <a:latin typeface="微软雅黑"/>
               </a:rPr>
-              <a:t>• 工程完整度：193 个自动化测试用例 · Docker 一键部署 · 全量审计 · 细粒度权限</a:t>
+              <a:t>• 工程完整度：234 个自动化测试用例 · Docker 一键部署 · 全量审计 · 细粒度权限</a:t>
             </a:r>
           </a:p>
         </p:txBody>

--- a/参赛材料/8-作品介绍PPT.pptx
+++ b/参赛材料/8-作品介绍PPT.pptx
@@ -5023,7 +5023,7 @@
                 </a:solidFill>
                 <a:latin typeface="微软雅黑"/>
               </a:rPr>
-              <a:t>• 工程完整度：234 个自动化测试用例 · Docker 一键部署 · 全量审计 · 细粒度权限</a:t>
+              <a:t>• 工程完整度：237 个自动化测试用例 · Docker 一键部署 · 全量审计 · 细粒度权限</a:t>
             </a:r>
           </a:p>
         </p:txBody>
